--- a/docs/ThermalSentinel_Presentation_v2.pptx
+++ b/docs/ThermalSentinel_Presentation_v2.pptx
@@ -3042,7 +3042,7 @@
                 <a:ea typeface="Calibri" pitchFamily="34" charset="-122"/>
                 <a:cs typeface="Calibri" pitchFamily="34" charset="-120"/>
               </a:rPr>
-              <a:t>&lt;TEAM NAME&gt;      </a:t>
+              <a:t>FireOrbit      </a:t>
             </a:r>
             <a:pPr indent="0" marL="0">
               <a:buNone/>
